--- a/textbook/ppt/chapter03_ppt.pptx
+++ b/textbook/ppt/chapter03_ppt.pptx
@@ -7,6 +7,12 @@
   <p:sldIdLst>
     <p:sldId id="256" r:id="rId7"/>
     <p:sldId id="257" r:id="rId8"/>
+    <p:sldId id="258" r:id="rId9"/>
+    <p:sldId id="259" r:id="rId10"/>
+    <p:sldId id="260" r:id="rId11"/>
+    <p:sldId id="261" r:id="rId12"/>
+    <p:sldId id="262" r:id="rId13"/>
+    <p:sldId id="263" r:id="rId14"/>
   </p:sldIdLst>
   <p:sldSz cx="12188952" cy="6858000" type="screen4x3"/>
   <p:notesSz cx="6858000" cy="9144000"/>
@@ -3229,6 +3235,630 @@
             <a:r>
               <a:rPr sz="1800"/>
               <a:t>• break 和 continue的基本概念与应用</a:t>
+            </a:r>
+          </a:p>
+        </p:txBody>
+      </p:sp>
+    </p:spTree>
+  </p:cSld>
+  <p:clrMapOvr>
+    <a:masterClrMapping/>
+  </p:clrMapOvr>
+</p:sld>
+</file>
+
+<file path=ppt/slides/slide3.xml><?xml version="1.0" encoding="utf-8"?>
+<p:sld xmlns:a="http://schemas.openxmlformats.org/drawingml/2006/main" xmlns:p="http://schemas.openxmlformats.org/presentationml/2006/main" xmlns:r="http://schemas.openxmlformats.org/officeDocument/2006/relationships">
+  <p:cSld>
+    <p:spTree>
+      <p:nvGrpSpPr>
+        <p:cNvPr id="1" name=""/>
+        <p:cNvGrpSpPr/>
+        <p:nvPr/>
+      </p:nvGrpSpPr>
+      <p:grpSpPr/>
+      <p:sp>
+        <p:nvSpPr>
+          <p:cNvPr id="2" name="TextBox 1"/>
+          <p:cNvSpPr txBox="1"/>
+          <p:nvPr/>
+        </p:nvSpPr>
+        <p:spPr>
+          <a:xfrm>
+            <a:off x="914400" y="457200"/>
+            <a:ext cx="10058400" cy="914400"/>
+          </a:xfrm>
+          <a:prstGeom prst="rect">
+            <a:avLst/>
+          </a:prstGeom>
+          <a:noFill/>
+        </p:spPr>
+        <p:txBody>
+          <a:bodyPr wrap="none">
+            <a:spAutoFit/>
+          </a:bodyPr>
+          <a:lstStyle/>
+          <a:p>
+            <a:r>
+              <a:rPr sz="2800" b="1">
+                <a:solidFill>
+                  <a:srgbClr val="8B0000"/>
+                </a:solidFill>
+              </a:rPr>
+              <a:t>本章概览</a:t>
+            </a:r>
+          </a:p>
+        </p:txBody>
+      </p:sp>
+      <p:sp>
+        <p:nvSpPr>
+          <p:cNvPr id="3" name="TextBox 2"/>
+          <p:cNvSpPr txBox="1"/>
+          <p:nvPr/>
+        </p:nvSpPr>
+        <p:spPr>
+          <a:xfrm>
+            <a:off x="914400" y="1371600"/>
+            <a:ext cx="10058400" cy="5029200"/>
+          </a:xfrm>
+          <a:prstGeom prst="rect">
+            <a:avLst/>
+          </a:prstGeom>
+          <a:noFill/>
+        </p:spPr>
+        <p:txBody>
+          <a:bodyPr wrap="none">
+            <a:spAutoFit/>
+          </a:bodyPr>
+          <a:lstStyle/>
+          <a:p/>
+          <a:p>
+            <a:r>
+              <a:rPr sz="1600">
+                <a:solidFill>
+                  <a:srgbClr val="000000"/>
+                </a:solidFill>
+              </a:rPr>
+              <a:t>for 循环：for(i=0; i&lt;n; i++)</a:t>
+            </a:r>
+          </a:p>
+          <a:p>
+            <a:r>
+              <a:rPr sz="1600">
+                <a:solidFill>
+                  <a:srgbClr val="000000"/>
+                </a:solidFill>
+              </a:rPr>
+              <a:t>while 循环：while(条件)</a:t>
+            </a:r>
+          </a:p>
+          <a:p>
+            <a:r>
+              <a:rPr sz="1600">
+                <a:solidFill>
+                  <a:srgbClr val="000000"/>
+                </a:solidFill>
+              </a:rPr>
+              <a:t>break 跳出循环，continue 跳过本次</a:t>
+            </a:r>
+          </a:p>
+          <a:p>
+            <a:r>
+              <a:rPr sz="1600">
+                <a:solidFill>
+                  <a:srgbClr val="000000"/>
+                </a:solidFill>
+              </a:rPr>
+              <a:t>嵌套循环：循环里套循环</a:t>
+            </a:r>
+          </a:p>
+        </p:txBody>
+      </p:sp>
+    </p:spTree>
+  </p:cSld>
+  <p:clrMapOvr>
+    <a:masterClrMapping/>
+  </p:clrMapOvr>
+</p:sld>
+</file>
+
+<file path=ppt/slides/slide4.xml><?xml version="1.0" encoding="utf-8"?>
+<p:sld xmlns:a="http://schemas.openxmlformats.org/drawingml/2006/main" xmlns:p="http://schemas.openxmlformats.org/presentationml/2006/main" xmlns:r="http://schemas.openxmlformats.org/officeDocument/2006/relationships">
+  <p:cSld>
+    <p:spTree>
+      <p:nvGrpSpPr>
+        <p:cNvPr id="1" name=""/>
+        <p:cNvGrpSpPr/>
+        <p:nvPr/>
+      </p:nvGrpSpPr>
+      <p:grpSpPr/>
+      <p:sp>
+        <p:nvSpPr>
+          <p:cNvPr id="2" name="TextBox 1"/>
+          <p:cNvSpPr txBox="1"/>
+          <p:nvPr/>
+        </p:nvSpPr>
+        <p:spPr>
+          <a:xfrm>
+            <a:off x="914400" y="457200"/>
+            <a:ext cx="10058400" cy="914400"/>
+          </a:xfrm>
+          <a:prstGeom prst="rect">
+            <a:avLst/>
+          </a:prstGeom>
+          <a:noFill/>
+        </p:spPr>
+        <p:txBody>
+          <a:bodyPr wrap="none">
+            <a:spAutoFit/>
+          </a:bodyPr>
+          <a:lstStyle/>
+          <a:p>
+            <a:r>
+              <a:rPr sz="2800" b="1">
+                <a:solidFill>
+                  <a:srgbClr val="8B0000"/>
+                </a:solidFill>
+              </a:rPr>
+              <a:t>C++ 代码示例</a:t>
+            </a:r>
+          </a:p>
+        </p:txBody>
+      </p:sp>
+      <p:sp>
+        <p:nvSpPr>
+          <p:cNvPr id="3" name="TextBox 2"/>
+          <p:cNvSpPr txBox="1"/>
+          <p:nvPr/>
+        </p:nvSpPr>
+        <p:spPr>
+          <a:xfrm>
+            <a:off x="914400" y="1371600"/>
+            <a:ext cx="10058400" cy="5029200"/>
+          </a:xfrm>
+          <a:prstGeom prst="rect">
+            <a:avLst/>
+          </a:prstGeom>
+          <a:noFill/>
+        </p:spPr>
+        <p:txBody>
+          <a:bodyPr wrap="none">
+            <a:spAutoFit/>
+          </a:bodyPr>
+          <a:lstStyle/>
+          <a:p/>
+          <a:p>
+            <a:r>
+              <a:rPr sz="1400">
+                <a:solidFill>
+                  <a:srgbClr val="000000"/>
+                </a:solidFill>
+              </a:rPr>
+              <a:t>for (int i = 1; i &lt;= 100; i++) {
+    if (i % 3 == 0) cout &lt;&lt; i &lt;&lt; endl;
+}</a:t>
+            </a:r>
+          </a:p>
+        </p:txBody>
+      </p:sp>
+    </p:spTree>
+  </p:cSld>
+  <p:clrMapOvr>
+    <a:masterClrMapping/>
+  </p:clrMapOvr>
+</p:sld>
+</file>
+
+<file path=ppt/slides/slide5.xml><?xml version="1.0" encoding="utf-8"?>
+<p:sld xmlns:a="http://schemas.openxmlformats.org/drawingml/2006/main" xmlns:p="http://schemas.openxmlformats.org/presentationml/2006/main" xmlns:r="http://schemas.openxmlformats.org/officeDocument/2006/relationships">
+  <p:cSld>
+    <p:spTree>
+      <p:nvGrpSpPr>
+        <p:cNvPr id="1" name=""/>
+        <p:cNvGrpSpPr/>
+        <p:nvPr/>
+      </p:nvGrpSpPr>
+      <p:grpSpPr/>
+      <p:sp>
+        <p:nvSpPr>
+          <p:cNvPr id="2" name="TextBox 1"/>
+          <p:cNvSpPr txBox="1"/>
+          <p:nvPr/>
+        </p:nvSpPr>
+        <p:spPr>
+          <a:xfrm>
+            <a:off x="914400" y="457200"/>
+            <a:ext cx="10058400" cy="914400"/>
+          </a:xfrm>
+          <a:prstGeom prst="rect">
+            <a:avLst/>
+          </a:prstGeom>
+          <a:noFill/>
+        </p:spPr>
+        <p:txBody>
+          <a:bodyPr wrap="none">
+            <a:spAutoFit/>
+          </a:bodyPr>
+          <a:lstStyle/>
+          <a:p>
+            <a:r>
+              <a:rPr sz="2800" b="1">
+                <a:solidFill>
+                  <a:srgbClr val="8B0000"/>
+                </a:solidFill>
+              </a:rPr>
+              <a:t>Python 代码示例</a:t>
+            </a:r>
+          </a:p>
+        </p:txBody>
+      </p:sp>
+      <p:sp>
+        <p:nvSpPr>
+          <p:cNvPr id="3" name="TextBox 2"/>
+          <p:cNvSpPr txBox="1"/>
+          <p:nvPr/>
+        </p:nvSpPr>
+        <p:spPr>
+          <a:xfrm>
+            <a:off x="914400" y="1371600"/>
+            <a:ext cx="10058400" cy="5029200"/>
+          </a:xfrm>
+          <a:prstGeom prst="rect">
+            <a:avLst/>
+          </a:prstGeom>
+          <a:noFill/>
+        </p:spPr>
+        <p:txBody>
+          <a:bodyPr wrap="none">
+            <a:spAutoFit/>
+          </a:bodyPr>
+          <a:lstStyle/>
+          <a:p/>
+          <a:p>
+            <a:r>
+              <a:rPr sz="1400">
+                <a:solidFill>
+                  <a:srgbClr val="000000"/>
+                </a:solidFill>
+              </a:rPr>
+              <a:t>for i in range(1, 101):
+    if i % 3 == 0:
+        print(i)</a:t>
+            </a:r>
+          </a:p>
+        </p:txBody>
+      </p:sp>
+    </p:spTree>
+  </p:cSld>
+  <p:clrMapOvr>
+    <a:masterClrMapping/>
+  </p:clrMapOvr>
+</p:sld>
+</file>
+
+<file path=ppt/slides/slide6.xml><?xml version="1.0" encoding="utf-8"?>
+<p:sld xmlns:a="http://schemas.openxmlformats.org/drawingml/2006/main" xmlns:p="http://schemas.openxmlformats.org/presentationml/2006/main" xmlns:r="http://schemas.openxmlformats.org/officeDocument/2006/relationships">
+  <p:cSld>
+    <p:spTree>
+      <p:nvGrpSpPr>
+        <p:cNvPr id="1" name=""/>
+        <p:cNvGrpSpPr/>
+        <p:nvPr/>
+      </p:nvGrpSpPr>
+      <p:grpSpPr/>
+      <p:sp>
+        <p:nvSpPr>
+          <p:cNvPr id="2" name="TextBox 1"/>
+          <p:cNvSpPr txBox="1"/>
+          <p:nvPr/>
+        </p:nvSpPr>
+        <p:spPr>
+          <a:xfrm>
+            <a:off x="914400" y="457200"/>
+            <a:ext cx="10058400" cy="914400"/>
+          </a:xfrm>
+          <a:prstGeom prst="rect">
+            <a:avLst/>
+          </a:prstGeom>
+          <a:noFill/>
+        </p:spPr>
+        <p:txBody>
+          <a:bodyPr wrap="none">
+            <a:spAutoFit/>
+          </a:bodyPr>
+          <a:lstStyle/>
+          <a:p>
+            <a:r>
+              <a:rPr sz="2800" b="1">
+                <a:solidFill>
+                  <a:srgbClr val="8B0000"/>
+                </a:solidFill>
+              </a:rPr>
+              <a:t>常见错误</a:t>
+            </a:r>
+          </a:p>
+        </p:txBody>
+      </p:sp>
+      <p:sp>
+        <p:nvSpPr>
+          <p:cNvPr id="3" name="TextBox 2"/>
+          <p:cNvSpPr txBox="1"/>
+          <p:nvPr/>
+        </p:nvSpPr>
+        <p:spPr>
+          <a:xfrm>
+            <a:off x="914400" y="1371600"/>
+            <a:ext cx="10058400" cy="5029200"/>
+          </a:xfrm>
+          <a:prstGeom prst="rect">
+            <a:avLst/>
+          </a:prstGeom>
+          <a:noFill/>
+        </p:spPr>
+        <p:txBody>
+          <a:bodyPr wrap="none">
+            <a:spAutoFit/>
+          </a:bodyPr>
+          <a:lstStyle/>
+          <a:p/>
+          <a:p>
+            <a:r>
+              <a:rPr sz="1600">
+                <a:solidFill>
+                  <a:srgbClr val="000000"/>
+                </a:solidFill>
+              </a:rPr>
+              <a:t>for循环边界：i&lt;n vs i&lt;=n</a:t>
+            </a:r>
+          </a:p>
+          <a:p>
+            <a:r>
+              <a:rPr sz="1600">
+                <a:solidFill>
+                  <a:srgbClr val="000000"/>
+                </a:solidFill>
+              </a:rPr>
+              <a:t>while循环忘记更新条件→死循环</a:t>
+            </a:r>
+          </a:p>
+          <a:p>
+            <a:r>
+              <a:rPr sz="1600">
+                <a:solidFill>
+                  <a:srgbClr val="000000"/>
+                </a:solidFill>
+              </a:rPr>
+              <a:t>break只跳出最内层循环</a:t>
+            </a:r>
+          </a:p>
+          <a:p>
+            <a:r>
+              <a:rPr sz="1600">
+                <a:solidFill>
+                  <a:srgbClr val="000000"/>
+                </a:solidFill>
+              </a:rPr>
+              <a:t>Python的range(1,n)不含n</a:t>
+            </a:r>
+          </a:p>
+        </p:txBody>
+      </p:sp>
+    </p:spTree>
+  </p:cSld>
+  <p:clrMapOvr>
+    <a:masterClrMapping/>
+  </p:clrMapOvr>
+</p:sld>
+</file>
+
+<file path=ppt/slides/slide7.xml><?xml version="1.0" encoding="utf-8"?>
+<p:sld xmlns:a="http://schemas.openxmlformats.org/drawingml/2006/main" xmlns:p="http://schemas.openxmlformats.org/presentationml/2006/main" xmlns:r="http://schemas.openxmlformats.org/officeDocument/2006/relationships">
+  <p:cSld>
+    <p:spTree>
+      <p:nvGrpSpPr>
+        <p:cNvPr id="1" name=""/>
+        <p:cNvGrpSpPr/>
+        <p:nvPr/>
+      </p:nvGrpSpPr>
+      <p:grpSpPr/>
+      <p:sp>
+        <p:nvSpPr>
+          <p:cNvPr id="2" name="TextBox 1"/>
+          <p:cNvSpPr txBox="1"/>
+          <p:nvPr/>
+        </p:nvSpPr>
+        <p:spPr>
+          <a:xfrm>
+            <a:off x="914400" y="457200"/>
+            <a:ext cx="10058400" cy="914400"/>
+          </a:xfrm>
+          <a:prstGeom prst="rect">
+            <a:avLst/>
+          </a:prstGeom>
+          <a:noFill/>
+        </p:spPr>
+        <p:txBody>
+          <a:bodyPr wrap="none">
+            <a:spAutoFit/>
+          </a:bodyPr>
+          <a:lstStyle/>
+          <a:p>
+            <a:r>
+              <a:rPr sz="2800" b="1">
+                <a:solidFill>
+                  <a:srgbClr val="8B0000"/>
+                </a:solidFill>
+              </a:rPr>
+              <a:t>练习题目</a:t>
+            </a:r>
+          </a:p>
+        </p:txBody>
+      </p:sp>
+      <p:sp>
+        <p:nvSpPr>
+          <p:cNvPr id="3" name="TextBox 2"/>
+          <p:cNvSpPr txBox="1"/>
+          <p:nvPr/>
+        </p:nvSpPr>
+        <p:spPr>
+          <a:xfrm>
+            <a:off x="914400" y="1371600"/>
+            <a:ext cx="10058400" cy="5029200"/>
+          </a:xfrm>
+          <a:prstGeom prst="rect">
+            <a:avLst/>
+          </a:prstGeom>
+          <a:noFill/>
+        </p:spPr>
+        <p:txBody>
+          <a:bodyPr wrap="none">
+            <a:spAutoFit/>
+          </a:bodyPr>
+          <a:lstStyle/>
+          <a:p/>
+          <a:p>
+            <a:r>
+              <a:rPr sz="1600">
+                <a:solidFill>
+                  <a:srgbClr val="000000"/>
+                </a:solidFill>
+              </a:rPr>
+              <a:t>JD029 石砖偶数</a:t>
+            </a:r>
+          </a:p>
+          <a:p>
+            <a:r>
+              <a:rPr sz="1600">
+                <a:solidFill>
+                  <a:srgbClr val="000000"/>
+                </a:solidFill>
+              </a:rPr>
+              <a:t>JD033 正数清点</a:t>
+            </a:r>
+          </a:p>
+          <a:p>
+            <a:r>
+              <a:rPr sz="1600">
+                <a:solidFill>
+                  <a:srgbClr val="000000"/>
+                </a:solidFill>
+              </a:rPr>
+              <a:t>JD037 数链连珠</a:t>
+            </a:r>
+          </a:p>
+        </p:txBody>
+      </p:sp>
+    </p:spTree>
+  </p:cSld>
+  <p:clrMapOvr>
+    <a:masterClrMapping/>
+  </p:clrMapOvr>
+</p:sld>
+</file>
+
+<file path=ppt/slides/slide8.xml><?xml version="1.0" encoding="utf-8"?>
+<p:sld xmlns:a="http://schemas.openxmlformats.org/drawingml/2006/main" xmlns:p="http://schemas.openxmlformats.org/presentationml/2006/main" xmlns:r="http://schemas.openxmlformats.org/officeDocument/2006/relationships">
+  <p:cSld>
+    <p:spTree>
+      <p:nvGrpSpPr>
+        <p:cNvPr id="1" name=""/>
+        <p:cNvGrpSpPr/>
+        <p:nvPr/>
+      </p:nvGrpSpPr>
+      <p:grpSpPr/>
+      <p:sp>
+        <p:nvSpPr>
+          <p:cNvPr id="2" name="TextBox 1"/>
+          <p:cNvSpPr txBox="1"/>
+          <p:nvPr/>
+        </p:nvSpPr>
+        <p:spPr>
+          <a:xfrm>
+            <a:off x="914400" y="457200"/>
+            <a:ext cx="10058400" cy="914400"/>
+          </a:xfrm>
+          <a:prstGeom prst="rect">
+            <a:avLst/>
+          </a:prstGeom>
+          <a:noFill/>
+        </p:spPr>
+        <p:txBody>
+          <a:bodyPr wrap="none">
+            <a:spAutoFit/>
+          </a:bodyPr>
+          <a:lstStyle/>
+          <a:p>
+            <a:r>
+              <a:rPr sz="2800" b="1">
+                <a:solidFill>
+                  <a:srgbClr val="8B0000"/>
+                </a:solidFill>
+              </a:rPr>
+              <a:t>本章小结</a:t>
+            </a:r>
+          </a:p>
+        </p:txBody>
+      </p:sp>
+      <p:sp>
+        <p:nvSpPr>
+          <p:cNvPr id="3" name="TextBox 2"/>
+          <p:cNvSpPr txBox="1"/>
+          <p:nvPr/>
+        </p:nvSpPr>
+        <p:spPr>
+          <a:xfrm>
+            <a:off x="914400" y="1371600"/>
+            <a:ext cx="10058400" cy="5029200"/>
+          </a:xfrm>
+          <a:prstGeom prst="rect">
+            <a:avLst/>
+          </a:prstGeom>
+          <a:noFill/>
+        </p:spPr>
+        <p:txBody>
+          <a:bodyPr wrap="none">
+            <a:spAutoFit/>
+          </a:bodyPr>
+          <a:lstStyle/>
+          <a:p/>
+          <a:p>
+            <a:r>
+              <a:rPr sz="1600">
+                <a:solidFill>
+                  <a:srgbClr val="000000"/>
+                </a:solidFill>
+              </a:rPr>
+              <a:t>掌握核心概念</a:t>
+            </a:r>
+          </a:p>
+          <a:p>
+            <a:r>
+              <a:rPr sz="1600">
+                <a:solidFill>
+                  <a:srgbClr val="000000"/>
+                </a:solidFill>
+              </a:rPr>
+              <a:t>多做练习</a:t>
+            </a:r>
+          </a:p>
+          <a:p>
+            <a:r>
+              <a:rPr sz="1600">
+                <a:solidFill>
+                  <a:srgbClr val="000000"/>
+                </a:solidFill>
+              </a:rPr>
+              <a:t>注意边界条件</a:t>
+            </a:r>
+          </a:p>
+          <a:p>
+            <a:r>
+              <a:rPr sz="1600">
+                <a:solidFill>
+                  <a:srgbClr val="000000"/>
+                </a:solidFill>
+              </a:rPr>
+              <a:t>理解算法思想而非死记代码</a:t>
             </a:r>
           </a:p>
         </p:txBody>

--- a/textbook/ppt/chapter03_ppt.pptx
+++ b/textbook/ppt/chapter03_ppt.pptx
@@ -12,7 +12,6 @@
     <p:sldId id="260" r:id="rId11"/>
     <p:sldId id="261" r:id="rId12"/>
     <p:sldId id="262" r:id="rId13"/>
-    <p:sldId id="263" r:id="rId14"/>
   </p:sldIdLst>
   <p:sldSz cx="12188952" cy="6858000" type="screen4x3"/>
   <p:notesSz cx="6858000" cy="9144000"/>
@@ -3124,18 +3123,7 @@
                   <a:srgbClr val="8B0000"/>
                 </a:solidFill>
               </a:rPr>
-              <a:t>第3章 千回百转</a:t>
-            </a:r>
-          </a:p>
-          <a:p>
-            <a:pPr algn="ctr"/>
-            <a:r>
-              <a:rPr sz="2400">
-                <a:solidFill>
-                  <a:srgbClr val="6B5D4D"/>
-                </a:solidFill>
-              </a:rPr>
-              <a:t>for与while</a:t>
+              <a:t>第3章</a:t>
             </a:r>
           </a:p>
         </p:txBody>
@@ -3166,8 +3154,8 @@
         </p:nvSpPr>
         <p:spPr>
           <a:xfrm>
-            <a:off x="914400" y="457200"/>
-            <a:ext cx="10058400" cy="914400"/>
+            <a:off x="457200" y="274320"/>
+            <a:ext cx="10972800" cy="731520"/>
           </a:xfrm>
           <a:prstGeom prst="rect">
             <a:avLst/>
@@ -3181,7 +3169,7 @@
           <a:lstStyle/>
           <a:p>
             <a:r>
-              <a:rPr sz="2800" b="1">
+              <a:rPr sz="2400" b="1">
                 <a:solidFill>
                   <a:srgbClr val="8B0000"/>
                 </a:solidFill>
@@ -3199,8 +3187,8 @@
         </p:nvSpPr>
         <p:spPr>
           <a:xfrm>
-            <a:off x="914400" y="1371600"/>
-            <a:ext cx="10058400" cy="4572000"/>
+            <a:off x="457200" y="1097280"/>
+            <a:ext cx="10972800" cy="5029200"/>
           </a:xfrm>
           <a:prstGeom prst="rect">
             <a:avLst/>
@@ -3215,26 +3203,42 @@
           <a:p/>
           <a:p>
             <a:r>
-              <a:rPr sz="1800"/>
-              <a:t>• for 循环的基本概念与应用</a:t>
-            </a:r>
-          </a:p>
-          <a:p>
-            <a:r>
-              <a:rPr sz="1800"/>
-              <a:t>• while 循环的基本概念与应用</a:t>
-            </a:r>
-          </a:p>
-          <a:p>
-            <a:r>
-              <a:rPr sz="1800"/>
-              <a:t>• 嵌套循环的基本概念与应用</a:t>
-            </a:r>
-          </a:p>
-          <a:p>
-            <a:r>
-              <a:rPr sz="1800"/>
-              <a:t>• break 和 continue的基本概念与应用</a:t>
+              <a:rPr sz="1400">
+                <a:solidFill>
+                  <a:srgbClr val="000000"/>
+                </a:solidFill>
+              </a:rPr>
+              <a:t>for 循环：知道循环次数时用</a:t>
+            </a:r>
+          </a:p>
+          <a:p>
+            <a:r>
+              <a:rPr sz="1400">
+                <a:solidFill>
+                  <a:srgbClr val="000000"/>
+                </a:solidFill>
+              </a:rPr>
+              <a:t>while 循环：不知道循环次数时用</a:t>
+            </a:r>
+          </a:p>
+          <a:p>
+            <a:r>
+              <a:rPr sz="1400">
+                <a:solidFill>
+                  <a:srgbClr val="000000"/>
+                </a:solidFill>
+              </a:rPr>
+              <a:t>break 跳出整个循环，continue 跳过当前迭代</a:t>
+            </a:r>
+          </a:p>
+          <a:p>
+            <a:r>
+              <a:rPr sz="1400">
+                <a:solidFill>
+                  <a:srgbClr val="000000"/>
+                </a:solidFill>
+              </a:rPr>
+              <a:t>嵌套循环：循环里面套循环，内层先跑完</a:t>
             </a:r>
           </a:p>
         </p:txBody>
@@ -3265,8 +3269,8 @@
         </p:nvSpPr>
         <p:spPr>
           <a:xfrm>
-            <a:off x="914400" y="457200"/>
-            <a:ext cx="10058400" cy="914400"/>
+            <a:off x="457200" y="274320"/>
+            <a:ext cx="10972800" cy="731520"/>
           </a:xfrm>
           <a:prstGeom prst="rect">
             <a:avLst/>
@@ -3280,12 +3284,12 @@
           <a:lstStyle/>
           <a:p>
             <a:r>
-              <a:rPr sz="2800" b="1">
+              <a:rPr sz="2400" b="1">
                 <a:solidFill>
                   <a:srgbClr val="8B0000"/>
                 </a:solidFill>
               </a:rPr>
-              <a:t>本章概览</a:t>
+              <a:t>C++ 代码示例</a:t>
             </a:r>
           </a:p>
         </p:txBody>
@@ -3298,8 +3302,8 @@
         </p:nvSpPr>
         <p:spPr>
           <a:xfrm>
-            <a:off x="914400" y="1371600"/>
-            <a:ext cx="10058400" cy="5029200"/>
+            <a:off x="457200" y="1097280"/>
+            <a:ext cx="10972800" cy="5029200"/>
           </a:xfrm>
           <a:prstGeom prst="rect">
             <a:avLst/>
@@ -3314,42 +3318,16 @@
           <a:p/>
           <a:p>
             <a:r>
-              <a:rPr sz="1600">
+              <a:rPr sz="1200">
                 <a:solidFill>
                   <a:srgbClr val="000000"/>
                 </a:solidFill>
               </a:rPr>
-              <a:t>for 循环：for(i=0; i&lt;n; i++)</a:t>
-            </a:r>
-          </a:p>
-          <a:p>
-            <a:r>
-              <a:rPr sz="1600">
-                <a:solidFill>
-                  <a:srgbClr val="000000"/>
-                </a:solidFill>
-              </a:rPr>
-              <a:t>while 循环：while(条件)</a:t>
-            </a:r>
-          </a:p>
-          <a:p>
-            <a:r>
-              <a:rPr sz="1600">
-                <a:solidFill>
-                  <a:srgbClr val="000000"/>
-                </a:solidFill>
-              </a:rPr>
-              <a:t>break 跳出循环，continue 跳过本次</a:t>
-            </a:r>
-          </a:p>
-          <a:p>
-            <a:r>
-              <a:rPr sz="1600">
-                <a:solidFill>
-                  <a:srgbClr val="000000"/>
-                </a:solidFill>
-              </a:rPr>
-              <a:t>嵌套循环：循环里套循环</a:t>
+              <a:t>// 打印1到100中所有偶数
+for (int i = 2; i &lt;= 100; i += 2) {
+    cout &lt;&lt; i &lt;&lt; ' ';
+}
+cout &lt;&lt; endl;</a:t>
             </a:r>
           </a:p>
         </p:txBody>
@@ -3380,8 +3358,8 @@
         </p:nvSpPr>
         <p:spPr>
           <a:xfrm>
-            <a:off x="914400" y="457200"/>
-            <a:ext cx="10058400" cy="914400"/>
+            <a:off x="457200" y="274320"/>
+            <a:ext cx="10972800" cy="731520"/>
           </a:xfrm>
           <a:prstGeom prst="rect">
             <a:avLst/>
@@ -3395,12 +3373,12 @@
           <a:lstStyle/>
           <a:p>
             <a:r>
-              <a:rPr sz="2800" b="1">
+              <a:rPr sz="2400" b="1">
                 <a:solidFill>
                   <a:srgbClr val="8B0000"/>
                 </a:solidFill>
               </a:rPr>
-              <a:t>C++ 代码示例</a:t>
+              <a:t>Python 代码示例</a:t>
             </a:r>
           </a:p>
         </p:txBody>
@@ -3413,8 +3391,8 @@
         </p:nvSpPr>
         <p:spPr>
           <a:xfrm>
-            <a:off x="914400" y="1371600"/>
-            <a:ext cx="10058400" cy="5029200"/>
+            <a:off x="457200" y="1097280"/>
+            <a:ext cx="10972800" cy="5029200"/>
           </a:xfrm>
           <a:prstGeom prst="rect">
             <a:avLst/>
@@ -3429,14 +3407,15 @@
           <a:p/>
           <a:p>
             <a:r>
-              <a:rPr sz="1400">
+              <a:rPr sz="1200">
                 <a:solidFill>
                   <a:srgbClr val="000000"/>
                 </a:solidFill>
               </a:rPr>
-              <a:t>for (int i = 1; i &lt;= 100; i++) {
-    if (i % 3 == 0) cout &lt;&lt; i &lt;&lt; endl;
-}</a:t>
+              <a:t># 打印1到100中所有偶数
+for i in range(2, 101, 2):
+    print(i, end=' ')
+print()</a:t>
             </a:r>
           </a:p>
         </p:txBody>
@@ -3467,8 +3446,8 @@
         </p:nvSpPr>
         <p:spPr>
           <a:xfrm>
-            <a:off x="914400" y="457200"/>
-            <a:ext cx="10058400" cy="914400"/>
+            <a:off x="457200" y="274320"/>
+            <a:ext cx="10972800" cy="731520"/>
           </a:xfrm>
           <a:prstGeom prst="rect">
             <a:avLst/>
@@ -3482,12 +3461,12 @@
           <a:lstStyle/>
           <a:p>
             <a:r>
-              <a:rPr sz="2800" b="1">
+              <a:rPr sz="2400" b="1">
                 <a:solidFill>
                   <a:srgbClr val="8B0000"/>
                 </a:solidFill>
               </a:rPr>
-              <a:t>Python 代码示例</a:t>
+              <a:t>常见错误</a:t>
             </a:r>
           </a:p>
         </p:txBody>
@@ -3500,8 +3479,8 @@
         </p:nvSpPr>
         <p:spPr>
           <a:xfrm>
-            <a:off x="914400" y="1371600"/>
-            <a:ext cx="10058400" cy="5029200"/>
+            <a:off x="457200" y="1097280"/>
+            <a:ext cx="10972800" cy="5029200"/>
           </a:xfrm>
           <a:prstGeom prst="rect">
             <a:avLst/>
@@ -3521,9 +3500,37 @@
                   <a:srgbClr val="000000"/>
                 </a:solidFill>
               </a:rPr>
-              <a:t>for i in range(1, 101):
-    if i % 3 == 0:
-        print(i)</a:t>
+              <a:t>for(i=0; i&lt;n; i++) 用&lt;，不是&lt;=（除非你真的想要n+1次）</a:t>
+            </a:r>
+          </a:p>
+          <a:p>
+            <a:r>
+              <a:rPr sz="1400">
+                <a:solidFill>
+                  <a:srgbClr val="000000"/>
+                </a:solidFill>
+              </a:rPr>
+              <a:t>while循环忘记更新条件 → 死循环</a:t>
+            </a:r>
+          </a:p>
+          <a:p>
+            <a:r>
+              <a:rPr sz="1400">
+                <a:solidFill>
+                  <a:srgbClr val="000000"/>
+                </a:solidFill>
+              </a:rPr>
+              <a:t>break只跳出最内层循环</a:t>
+            </a:r>
+          </a:p>
+          <a:p>
+            <a:r>
+              <a:rPr sz="1400">
+                <a:solidFill>
+                  <a:srgbClr val="000000"/>
+                </a:solidFill>
+              </a:rPr>
+              <a:t>Python range(1,n) 不含 n！range(1,n+1) 才含n</a:t>
             </a:r>
           </a:p>
         </p:txBody>
@@ -3554,8 +3561,8 @@
         </p:nvSpPr>
         <p:spPr>
           <a:xfrm>
-            <a:off x="914400" y="457200"/>
-            <a:ext cx="10058400" cy="914400"/>
+            <a:off x="457200" y="274320"/>
+            <a:ext cx="10972800" cy="731520"/>
           </a:xfrm>
           <a:prstGeom prst="rect">
             <a:avLst/>
@@ -3569,12 +3576,12 @@
           <a:lstStyle/>
           <a:p>
             <a:r>
-              <a:rPr sz="2800" b="1">
+              <a:rPr sz="2400" b="1">
                 <a:solidFill>
                   <a:srgbClr val="8B0000"/>
                 </a:solidFill>
               </a:rPr>
-              <a:t>常见错误</a:t>
+              <a:t>练习题目</a:t>
             </a:r>
           </a:p>
         </p:txBody>
@@ -3587,8 +3594,8 @@
         </p:nvSpPr>
         <p:spPr>
           <a:xfrm>
-            <a:off x="914400" y="1371600"/>
-            <a:ext cx="10058400" cy="5029200"/>
+            <a:off x="457200" y="1097280"/>
+            <a:ext cx="10972800" cy="5029200"/>
           </a:xfrm>
           <a:prstGeom prst="rect">
             <a:avLst/>
@@ -3603,42 +3610,32 @@
           <a:p/>
           <a:p>
             <a:r>
-              <a:rPr sz="1600">
+              <a:rPr sz="1400">
                 <a:solidFill>
                   <a:srgbClr val="000000"/>
                 </a:solidFill>
               </a:rPr>
-              <a:t>for循环边界：i&lt;n vs i&lt;=n</a:t>
-            </a:r>
-          </a:p>
-          <a:p>
-            <a:r>
-              <a:rPr sz="1600">
+              <a:t>JD029 石砖偶数 - 打印偶数 (Easy)</a:t>
+            </a:r>
+          </a:p>
+          <a:p>
+            <a:r>
+              <a:rPr sz="1400">
                 <a:solidFill>
                   <a:srgbClr val="000000"/>
                 </a:solidFill>
               </a:rPr>
-              <a:t>while循环忘记更新条件→死循环</a:t>
-            </a:r>
-          </a:p>
-          <a:p>
-            <a:r>
-              <a:rPr sz="1600">
+              <a:t>JD033 正数清点 - 计数 (Easy)</a:t>
+            </a:r>
+          </a:p>
+          <a:p>
+            <a:r>
+              <a:rPr sz="1400">
                 <a:solidFill>
                   <a:srgbClr val="000000"/>
                 </a:solidFill>
               </a:rPr>
-              <a:t>break只跳出最内层循环</a:t>
-            </a:r>
-          </a:p>
-          <a:p>
-            <a:r>
-              <a:rPr sz="1600">
-                <a:solidFill>
-                  <a:srgbClr val="000000"/>
-                </a:solidFill>
-              </a:rPr>
-              <a:t>Python的range(1,n)不含n</a:t>
+              <a:t>JD037 数链连珠 - 嵌套循环 (Medium)</a:t>
             </a:r>
           </a:p>
         </p:txBody>
@@ -3669,8 +3666,8 @@
         </p:nvSpPr>
         <p:spPr>
           <a:xfrm>
-            <a:off x="914400" y="457200"/>
-            <a:ext cx="10058400" cy="914400"/>
+            <a:off x="457200" y="274320"/>
+            <a:ext cx="10972800" cy="731520"/>
           </a:xfrm>
           <a:prstGeom prst="rect">
             <a:avLst/>
@@ -3684,12 +3681,12 @@
           <a:lstStyle/>
           <a:p>
             <a:r>
-              <a:rPr sz="2800" b="1">
+              <a:rPr sz="2400" b="1">
                 <a:solidFill>
                   <a:srgbClr val="8B0000"/>
                 </a:solidFill>
               </a:rPr>
-              <a:t>练习题目</a:t>
+              <a:t>本章小结</a:t>
             </a:r>
           </a:p>
         </p:txBody>
@@ -3702,8 +3699,8 @@
         </p:nvSpPr>
         <p:spPr>
           <a:xfrm>
-            <a:off x="914400" y="1371600"/>
-            <a:ext cx="10058400" cy="5029200"/>
+            <a:off x="457200" y="1097280"/>
+            <a:ext cx="10972800" cy="5029200"/>
           </a:xfrm>
           <a:prstGeom prst="rect">
             <a:avLst/>
@@ -3718,147 +3715,42 @@
           <a:p/>
           <a:p>
             <a:r>
-              <a:rPr sz="1600">
+              <a:rPr sz="1400">
                 <a:solidFill>
                   <a:srgbClr val="000000"/>
                 </a:solidFill>
               </a:rPr>
-              <a:t>JD029 石砖偶数</a:t>
-            </a:r>
-          </a:p>
-          <a:p>
-            <a:r>
-              <a:rPr sz="1600">
+              <a:t>本章学习了第3章的核心概念</a:t>
+            </a:r>
+          </a:p>
+          <a:p>
+            <a:r>
+              <a:rPr sz="1400">
                 <a:solidFill>
                   <a:srgbClr val="000000"/>
                 </a:solidFill>
               </a:rPr>
-              <a:t>JD033 正数清点</a:t>
-            </a:r>
-          </a:p>
-          <a:p>
-            <a:r>
-              <a:rPr sz="1600">
+              <a:t>多做练习是掌握算法的关键</a:t>
+            </a:r>
+          </a:p>
+          <a:p>
+            <a:r>
+              <a:rPr sz="1400">
                 <a:solidFill>
                   <a:srgbClr val="000000"/>
                 </a:solidFill>
               </a:rPr>
-              <a:t>JD037 数链连珠</a:t>
-            </a:r>
-          </a:p>
-        </p:txBody>
-      </p:sp>
-    </p:spTree>
-  </p:cSld>
-  <p:clrMapOvr>
-    <a:masterClrMapping/>
-  </p:clrMapOvr>
-</p:sld>
-</file>
-
-<file path=ppt/slides/slide8.xml><?xml version="1.0" encoding="utf-8"?>
-<p:sld xmlns:a="http://schemas.openxmlformats.org/drawingml/2006/main" xmlns:p="http://schemas.openxmlformats.org/presentationml/2006/main" xmlns:r="http://schemas.openxmlformats.org/officeDocument/2006/relationships">
-  <p:cSld>
-    <p:spTree>
-      <p:nvGrpSpPr>
-        <p:cNvPr id="1" name=""/>
-        <p:cNvGrpSpPr/>
-        <p:nvPr/>
-      </p:nvGrpSpPr>
-      <p:grpSpPr/>
-      <p:sp>
-        <p:nvSpPr>
-          <p:cNvPr id="2" name="TextBox 1"/>
-          <p:cNvSpPr txBox="1"/>
-          <p:nvPr/>
-        </p:nvSpPr>
-        <p:spPr>
-          <a:xfrm>
-            <a:off x="914400" y="457200"/>
-            <a:ext cx="10058400" cy="914400"/>
-          </a:xfrm>
-          <a:prstGeom prst="rect">
-            <a:avLst/>
-          </a:prstGeom>
-          <a:noFill/>
-        </p:spPr>
-        <p:txBody>
-          <a:bodyPr wrap="none">
-            <a:spAutoFit/>
-          </a:bodyPr>
-          <a:lstStyle/>
-          <a:p>
-            <a:r>
-              <a:rPr sz="2800" b="1">
-                <a:solidFill>
-                  <a:srgbClr val="8B0000"/>
+              <a:t>理解算法思想比死记代码更重要</a:t>
+            </a:r>
+          </a:p>
+          <a:p>
+            <a:r>
+              <a:rPr sz="1400">
+                <a:solidFill>
+                  <a:srgbClr val="000000"/>
                 </a:solidFill>
               </a:rPr>
-              <a:t>本章小结</a:t>
-            </a:r>
-          </a:p>
-        </p:txBody>
-      </p:sp>
-      <p:sp>
-        <p:nvSpPr>
-          <p:cNvPr id="3" name="TextBox 2"/>
-          <p:cNvSpPr txBox="1"/>
-          <p:nvPr/>
-        </p:nvSpPr>
-        <p:spPr>
-          <a:xfrm>
-            <a:off x="914400" y="1371600"/>
-            <a:ext cx="10058400" cy="5029200"/>
-          </a:xfrm>
-          <a:prstGeom prst="rect">
-            <a:avLst/>
-          </a:prstGeom>
-          <a:noFill/>
-        </p:spPr>
-        <p:txBody>
-          <a:bodyPr wrap="none">
-            <a:spAutoFit/>
-          </a:bodyPr>
-          <a:lstStyle/>
-          <a:p/>
-          <a:p>
-            <a:r>
-              <a:rPr sz="1600">
-                <a:solidFill>
-                  <a:srgbClr val="000000"/>
-                </a:solidFill>
-              </a:rPr>
-              <a:t>掌握核心概念</a:t>
-            </a:r>
-          </a:p>
-          <a:p>
-            <a:r>
-              <a:rPr sz="1600">
-                <a:solidFill>
-                  <a:srgbClr val="000000"/>
-                </a:solidFill>
-              </a:rPr>
-              <a:t>多做练习</a:t>
-            </a:r>
-          </a:p>
-          <a:p>
-            <a:r>
-              <a:rPr sz="1600">
-                <a:solidFill>
-                  <a:srgbClr val="000000"/>
-                </a:solidFill>
-              </a:rPr>
-              <a:t>注意边界条件</a:t>
-            </a:r>
-          </a:p>
-          <a:p>
-            <a:r>
-              <a:rPr sz="1600">
-                <a:solidFill>
-                  <a:srgbClr val="000000"/>
-                </a:solidFill>
-              </a:rPr>
-              <a:t>理解算法思想而非死记代码</a:t>
+              <a:t>遇到问题先画图、再想算法、最后写代码</a:t>
             </a:r>
           </a:p>
         </p:txBody>

--- a/textbook/ppt/chapter03_ppt.pptx
+++ b/textbook/ppt/chapter03_ppt.pptx
@@ -12,6 +12,7 @@
     <p:sldId id="260" r:id="rId11"/>
     <p:sldId id="261" r:id="rId12"/>
     <p:sldId id="262" r:id="rId13"/>
+    <p:sldId id="263" r:id="rId14"/>
   </p:sldIdLst>
   <p:sldSz cx="12188952" cy="6858000" type="screen4x3"/>
   <p:notesSz cx="6858000" cy="9144000"/>
@@ -3751,6 +3752,91 @@
                 </a:solidFill>
               </a:rPr>
               <a:t>遇到问题先画图、再想算法、最后写代码</a:t>
+            </a:r>
+          </a:p>
+        </p:txBody>
+      </p:sp>
+    </p:spTree>
+  </p:cSld>
+  <p:clrMapOvr>
+    <a:masterClrMapping/>
+  </p:clrMapOvr>
+</p:sld>
+</file>
+
+<file path=ppt/slides/slide8.xml><?xml version="1.0" encoding="utf-8"?>
+<p:sld xmlns:a="http://schemas.openxmlformats.org/drawingml/2006/main" xmlns:p="http://schemas.openxmlformats.org/presentationml/2006/main" xmlns:r="http://schemas.openxmlformats.org/officeDocument/2006/relationships">
+  <p:cSld>
+    <p:spTree>
+      <p:nvGrpSpPr>
+        <p:cNvPr id="1" name=""/>
+        <p:cNvGrpSpPr/>
+        <p:nvPr/>
+      </p:nvGrpSpPr>
+      <p:grpSpPr/>
+      <p:sp>
+        <p:nvSpPr>
+          <p:cNvPr id="2" name="TextBox 1"/>
+          <p:cNvSpPr txBox="1"/>
+          <p:nvPr/>
+        </p:nvSpPr>
+        <p:spPr>
+          <a:xfrm>
+            <a:off x="457200" y="274320"/>
+            <a:ext cx="10972800" cy="731520"/>
+          </a:xfrm>
+          <a:prstGeom prst="rect">
+            <a:avLst/>
+          </a:prstGeom>
+          <a:noFill/>
+        </p:spPr>
+        <p:txBody>
+          <a:bodyPr wrap="none">
+            <a:spAutoFit/>
+          </a:bodyPr>
+          <a:lstStyle/>
+          <a:p>
+            <a:r>
+              <a:rPr sz="2400" b="1">
+                <a:solidFill>
+                  <a:srgbClr val="8B0000"/>
+                </a:solidFill>
+              </a:rPr>
+              <a:t>本章概览</a:t>
+            </a:r>
+          </a:p>
+        </p:txBody>
+      </p:sp>
+      <p:sp>
+        <p:nvSpPr>
+          <p:cNvPr id="3" name="TextBox 2"/>
+          <p:cNvSpPr txBox="1"/>
+          <p:nvPr/>
+        </p:nvSpPr>
+        <p:spPr>
+          <a:xfrm>
+            <a:off x="457200" y="1097280"/>
+            <a:ext cx="10972800" cy="5029200"/>
+          </a:xfrm>
+          <a:prstGeom prst="rect">
+            <a:avLst/>
+          </a:prstGeom>
+          <a:noFill/>
+        </p:spPr>
+        <p:txBody>
+          <a:bodyPr wrap="none">
+            <a:spAutoFit/>
+          </a:bodyPr>
+          <a:lstStyle/>
+          <a:p/>
+          <a:p>
+            <a:r>
+              <a:rPr sz="1600">
+                <a:solidFill>
+                  <a:srgbClr val="000000"/>
+                </a:solidFill>
+              </a:rPr>
+              <a:t>本章学习循环——让程序自动重复执行代码。for和while是两种基本循环结构。</a:t>
             </a:r>
           </a:p>
         </p:txBody>

--- a/textbook/ppt/chapter03_ppt.pptx
+++ b/textbook/ppt/chapter03_ppt.pptx
@@ -13,6 +13,7 @@
     <p:sldId id="261" r:id="rId12"/>
     <p:sldId id="262" r:id="rId13"/>
     <p:sldId id="263" r:id="rId14"/>
+    <p:sldId id="264" r:id="rId15"/>
   </p:sldIdLst>
   <p:sldSz cx="12188952" cy="6858000" type="screen4x3"/>
   <p:notesSz cx="6858000" cy="9144000"/>
@@ -3721,7 +3722,7 @@
                   <a:srgbClr val="000000"/>
                 </a:solidFill>
               </a:rPr>
-              <a:t>本章学习了第3章的核心概念</a:t>
+              <a:t/>
             </a:r>
           </a:p>
           <a:p>
@@ -3731,7 +3732,7 @@
                   <a:srgbClr val="000000"/>
                 </a:solidFill>
               </a:rPr>
-              <a:t>多做练习是掌握算法的关键</a:t>
+              <a:t/>
             </a:r>
           </a:p>
           <a:p>
@@ -3741,7 +3742,7 @@
                   <a:srgbClr val="000000"/>
                 </a:solidFill>
               </a:rPr>
-              <a:t>理解算法思想比死记代码更重要</a:t>
+              <a:t/>
             </a:r>
           </a:p>
           <a:p>
@@ -3751,7 +3752,7 @@
                   <a:srgbClr val="000000"/>
                 </a:solidFill>
               </a:rPr>
-              <a:t>遇到问题先画图、再想算法、最后写代码</a:t>
+              <a:t/>
             </a:r>
           </a:p>
         </p:txBody>
@@ -3837,6 +3838,121 @@
                 </a:solidFill>
               </a:rPr>
               <a:t>本章学习循环——让程序自动重复执行代码。for和while是两种基本循环结构。</a:t>
+            </a:r>
+          </a:p>
+        </p:txBody>
+      </p:sp>
+    </p:spTree>
+  </p:cSld>
+  <p:clrMapOvr>
+    <a:masterClrMapping/>
+  </p:clrMapOvr>
+</p:sld>
+</file>
+
+<file path=ppt/slides/slide9.xml><?xml version="1.0" encoding="utf-8"?>
+<p:sld xmlns:a="http://schemas.openxmlformats.org/drawingml/2006/main" xmlns:p="http://schemas.openxmlformats.org/presentationml/2006/main" xmlns:r="http://schemas.openxmlformats.org/officeDocument/2006/relationships">
+  <p:cSld>
+    <p:spTree>
+      <p:nvGrpSpPr>
+        <p:cNvPr id="1" name=""/>
+        <p:cNvGrpSpPr/>
+        <p:nvPr/>
+      </p:nvGrpSpPr>
+      <p:grpSpPr/>
+      <p:sp>
+        <p:nvSpPr>
+          <p:cNvPr id="2" name="TextBox 1"/>
+          <p:cNvSpPr txBox="1"/>
+          <p:nvPr/>
+        </p:nvSpPr>
+        <p:spPr>
+          <a:xfrm>
+            <a:off x="457200" y="274320"/>
+            <a:ext cx="10972800" cy="731520"/>
+          </a:xfrm>
+          <a:prstGeom prst="rect">
+            <a:avLst/>
+          </a:prstGeom>
+          <a:noFill/>
+        </p:spPr>
+        <p:txBody>
+          <a:bodyPr wrap="none">
+            <a:spAutoFit/>
+          </a:bodyPr>
+          <a:lstStyle/>
+          <a:p>
+            <a:r>
+              <a:rPr sz="2400" b="1">
+                <a:solidFill>
+                  <a:srgbClr val="8B0000"/>
+                </a:solidFill>
+              </a:rPr>
+              <a:t>第3章 核心要点</a:t>
+            </a:r>
+          </a:p>
+        </p:txBody>
+      </p:sp>
+      <p:sp>
+        <p:nvSpPr>
+          <p:cNvPr id="3" name="TextBox 2"/>
+          <p:cNvSpPr txBox="1"/>
+          <p:nvPr/>
+        </p:nvSpPr>
+        <p:spPr>
+          <a:xfrm>
+            <a:off x="457200" y="1097280"/>
+            <a:ext cx="10972800" cy="5029200"/>
+          </a:xfrm>
+          <a:prstGeom prst="rect">
+            <a:avLst/>
+          </a:prstGeom>
+          <a:noFill/>
+        </p:spPr>
+        <p:txBody>
+          <a:bodyPr wrap="none">
+            <a:spAutoFit/>
+          </a:bodyPr>
+          <a:lstStyle/>
+          <a:p/>
+          <a:p>
+            <a:r>
+              <a:rPr sz="1600">
+                <a:solidFill>
+                  <a:srgbClr val="000000"/>
+                </a:solidFill>
+              </a:rPr>
+              <a:t>• for 循环和 while 循环的区别</a:t>
+            </a:r>
+          </a:p>
+          <a:p>
+            <a:r>
+              <a:rPr sz="1600">
+                <a:solidFill>
+                  <a:srgbClr val="000000"/>
+                </a:solidFill>
+              </a:rPr>
+              <a:t>• break 和 continue 的使用</a:t>
+            </a:r>
+          </a:p>
+          <a:p>
+            <a:r>
+              <a:rPr sz="1600">
+                <a:solidFill>
+                  <a:srgbClr val="000000"/>
+                </a:solidFill>
+              </a:rPr>
+              <a:t>• 嵌套循环的执行顺序</a:t>
+            </a:r>
+          </a:p>
+          <a:p>
+            <a:r>
+              <a:rPr sz="1600">
+                <a:solidFill>
+                  <a:srgbClr val="000000"/>
+                </a:solidFill>
+              </a:rPr>
+              <a:t>• 避免死循环的方法</a:t>
             </a:r>
           </a:p>
         </p:txBody>
